--- a/src/assets/downloads/example-deck-summit.pptx
+++ b/src/assets/downloads/example-deck-summit.pptx
@@ -3763,7 +3763,7 @@
       </p:sp>
       <p:pic>
         <p:nvPicPr>
-          <p:cNvPr id="7" name="Image 0" descr="/var/folders/lw/rmylcyvd5rjfxk9g1z9rrm8w0000gq/T/showship-deck-UJCJE2/logo_trimmed.png">    </p:cNvPr>
+          <p:cNvPr id="7" name="Image 0" descr="/var/folders/lw/rmylcyvd5rjfxk9g1z9rrm8w0000gq/T/showship-deck-pIoW97/logo_trimmed.png">    </p:cNvPr>
           <p:cNvPicPr>
             <a:picLocks noChangeAspect="1"/>
           </p:cNvPicPr>
@@ -4423,7 +4423,7 @@
       </p:sp>
       <p:pic>
         <p:nvPicPr>
-          <p:cNvPr id="9" name="Image 0" descr="/var/folders/lw/rmylcyvd5rjfxk9g1z9rrm8w0000gq/T/showship-deck-UJCJE2/paper_mark.png">    </p:cNvPr>
+          <p:cNvPr id="9" name="Image 0" descr="/var/folders/lw/rmylcyvd5rjfxk9g1z9rrm8w0000gq/T/showship-deck-pIoW97/paper_mark.png">    </p:cNvPr>
           <p:cNvPicPr>
             <a:picLocks noChangeAspect="1"/>
           </p:cNvPicPr>
@@ -4606,8 +4606,8 @@
         </p:nvSpPr>
         <p:spPr>
           <a:xfrm>
-            <a:off x="8869680" y="1892808"/>
-            <a:ext cx="2450592" cy="745998"/>
+            <a:off x="8869680" y="1874520"/>
+            <a:ext cx="2450592" cy="651053"/>
           </a:xfrm>
           <a:prstGeom prst="rect">
             <a:avLst/>
@@ -4709,8 +4709,8 @@
         </p:nvSpPr>
         <p:spPr>
           <a:xfrm>
-            <a:off x="8869680" y="3432048"/>
-            <a:ext cx="2450592" cy="745998"/>
+            <a:off x="8869680" y="3413760"/>
+            <a:ext cx="2450592" cy="651053"/>
           </a:xfrm>
           <a:prstGeom prst="rect">
             <a:avLst/>
@@ -4812,8 +4812,8 @@
         </p:nvSpPr>
         <p:spPr>
           <a:xfrm>
-            <a:off x="8869680" y="4971288"/>
-            <a:ext cx="2450592" cy="745998"/>
+            <a:off x="8869680" y="4953000"/>
+            <a:ext cx="2450592" cy="651053"/>
           </a:xfrm>
           <a:prstGeom prst="rect">
             <a:avLst/>
@@ -5137,7 +5137,7 @@
       </p:sp>
       <p:pic>
         <p:nvPicPr>
-          <p:cNvPr id="9" name="Image 0" descr="/var/folders/lw/rmylcyvd5rjfxk9g1z9rrm8w0000gq/T/showship-deck-UJCJE2/paper_mark.png">    </p:cNvPr>
+          <p:cNvPr id="9" name="Image 0" descr="/var/folders/lw/rmylcyvd5rjfxk9g1z9rrm8w0000gq/T/showship-deck-pIoW97/paper_mark.png">    </p:cNvPr>
           <p:cNvPicPr>
             <a:picLocks noChangeAspect="1"/>
           </p:cNvPicPr>
@@ -6326,7 +6326,7 @@
       </p:sp>
       <p:pic>
         <p:nvPicPr>
-          <p:cNvPr id="7" name="Image 0" descr="/var/folders/lw/rmylcyvd5rjfxk9g1z9rrm8w0000gq/T/showship-deck-UJCJE2/logo_trimmed.png">    </p:cNvPr>
+          <p:cNvPr id="7" name="Image 0" descr="/var/folders/lw/rmylcyvd5rjfxk9g1z9rrm8w0000gq/T/showship-deck-pIoW97/logo_trimmed.png">    </p:cNvPr>
           <p:cNvPicPr>
             <a:picLocks noChangeAspect="1"/>
           </p:cNvPicPr>
@@ -6908,7 +6908,7 @@
       </p:sp>
       <p:pic>
         <p:nvPicPr>
-          <p:cNvPr id="9" name="Image 0" descr="/var/folders/lw/rmylcyvd5rjfxk9g1z9rrm8w0000gq/T/showship-deck-UJCJE2/paper_mark.png">    </p:cNvPr>
+          <p:cNvPr id="9" name="Image 0" descr="/var/folders/lw/rmylcyvd5rjfxk9g1z9rrm8w0000gq/T/showship-deck-pIoW97/paper_mark.png">    </p:cNvPr>
           <p:cNvPicPr>
             <a:picLocks noChangeAspect="1"/>
           </p:cNvPicPr>
@@ -8065,7 +8065,7 @@
       </p:sp>
       <p:pic>
         <p:nvPicPr>
-          <p:cNvPr id="9" name="Image 0" descr="/var/folders/lw/rmylcyvd5rjfxk9g1z9rrm8w0000gq/T/showship-deck-UJCJE2/paper_mark.png">    </p:cNvPr>
+          <p:cNvPr id="9" name="Image 0" descr="/var/folders/lw/rmylcyvd5rjfxk9g1z9rrm8w0000gq/T/showship-deck-pIoW97/paper_mark.png">    </p:cNvPr>
           <p:cNvPicPr>
             <a:picLocks noChangeAspect="1"/>
           </p:cNvPicPr>
@@ -9276,7 +9276,7 @@
       </p:sp>
       <p:pic>
         <p:nvPicPr>
-          <p:cNvPr id="9" name="Image 0" descr="/var/folders/lw/rmylcyvd5rjfxk9g1z9rrm8w0000gq/T/showship-deck-UJCJE2/paper_mark.png">    </p:cNvPr>
+          <p:cNvPr id="9" name="Image 0" descr="/var/folders/lw/rmylcyvd5rjfxk9g1z9rrm8w0000gq/T/showship-deck-pIoW97/paper_mark.png">    </p:cNvPr>
           <p:cNvPicPr>
             <a:picLocks noChangeAspect="1"/>
           </p:cNvPicPr>
@@ -10488,7 +10488,7 @@
       </p:sp>
       <p:pic>
         <p:nvPicPr>
-          <p:cNvPr id="9" name="Image 0" descr="/var/folders/lw/rmylcyvd5rjfxk9g1z9rrm8w0000gq/T/showship-deck-UJCJE2/paper_mark.png">    </p:cNvPr>
+          <p:cNvPr id="9" name="Image 0" descr="/var/folders/lw/rmylcyvd5rjfxk9g1z9rrm8w0000gq/T/showship-deck-pIoW97/paper_mark.png">    </p:cNvPr>
           <p:cNvPicPr>
             <a:picLocks noChangeAspect="1"/>
           </p:cNvPicPr>
@@ -11134,7 +11134,7 @@
       </p:sp>
       <p:pic>
         <p:nvPicPr>
-          <p:cNvPr id="9" name="Image 0" descr="/var/folders/lw/rmylcyvd5rjfxk9g1z9rrm8w0000gq/T/showship-deck-UJCJE2/paper_mark.png">    </p:cNvPr>
+          <p:cNvPr id="9" name="Image 0" descr="/var/folders/lw/rmylcyvd5rjfxk9g1z9rrm8w0000gq/T/showship-deck-pIoW97/paper_mark.png">    </p:cNvPr>
           <p:cNvPicPr>
             <a:picLocks noChangeAspect="1"/>
           </p:cNvPicPr>
@@ -12952,7 +12952,7 @@
       </p:sp>
       <p:pic>
         <p:nvPicPr>
-          <p:cNvPr id="9" name="Image 0" descr="/var/folders/lw/rmylcyvd5rjfxk9g1z9rrm8w0000gq/T/showship-deck-UJCJE2/paper_mark.png">    </p:cNvPr>
+          <p:cNvPr id="9" name="Image 0" descr="/var/folders/lw/rmylcyvd5rjfxk9g1z9rrm8w0000gq/T/showship-deck-pIoW97/paper_mark.png">    </p:cNvPr>
           <p:cNvPicPr>
             <a:picLocks noChangeAspect="1"/>
           </p:cNvPicPr>
@@ -14132,7 +14132,7 @@
       </p:sp>
       <p:pic>
         <p:nvPicPr>
-          <p:cNvPr id="9" name="Image 0" descr="/var/folders/lw/rmylcyvd5rjfxk9g1z9rrm8w0000gq/T/showship-deck-UJCJE2/paper_mark.png">    </p:cNvPr>
+          <p:cNvPr id="9" name="Image 0" descr="/var/folders/lw/rmylcyvd5rjfxk9g1z9rrm8w0000gq/T/showship-deck-pIoW97/paper_mark.png">    </p:cNvPr>
           <p:cNvPicPr>
             <a:picLocks noChangeAspect="1"/>
           </p:cNvPicPr>
@@ -14874,7 +14874,7 @@
       </p:sp>
       <p:pic>
         <p:nvPicPr>
-          <p:cNvPr id="9" name="Image 0" descr="/var/folders/lw/rmylcyvd5rjfxk9g1z9rrm8w0000gq/T/showship-deck-UJCJE2/paper_mark.png">    </p:cNvPr>
+          <p:cNvPr id="9" name="Image 0" descr="/var/folders/lw/rmylcyvd5rjfxk9g1z9rrm8w0000gq/T/showship-deck-pIoW97/paper_mark.png">    </p:cNvPr>
           <p:cNvPicPr>
             <a:picLocks noChangeAspect="1"/>
           </p:cNvPicPr>
@@ -17063,7 +17063,7 @@
         </p:nvSpPr>
         <p:spPr>
           <a:xfrm>
-            <a:off x="640080" y="6236208"/>
+            <a:off x="640080" y="6163056"/>
             <a:ext cx="10908792" cy="237744"/>
           </a:xfrm>
           <a:prstGeom prst="rect">
